--- a/curriculum/M01/W09/L03/slides.pptx
+++ b/curriculum/M01/W09/L03/slides.pptx
@@ -5111,7 +5111,7 @@
               </a:spcAft>
             </a:pPr>
             <a:r>
-              <a:rPr sz="1400" b="1" i="0">
+              <a:rPr sz="1800" b="1" i="0">
                 <a:solidFill>
                   <a:srgbClr val="F2B705"/>
                 </a:solidFill>
@@ -5122,62 +5122,18 @@
               <a:t>•  </a:t>
             </a:r>
             <a:r>
-              <a:rPr sz="1400" b="0" i="0">
-                <a:solidFill>
-                  <a:srgbClr val="11202B"/>
-                </a:solidFill>
-                <a:latin typeface="Malgun Gothic"/>
-                <a:ea typeface="Malgun Gothic"/>
-                <a:cs typeface="Malgun Gothic"/>
-              </a:rPr>
-              <a:t>6. Glyceraldehyde-3-phosphate → 1,3-bisphosphoglycerate. </a:t>
-            </a:r>
-            <a:r>
-              <a:rPr sz="1400" b="1" i="0">
-                <a:solidFill>
-                  <a:srgbClr val="11202B"/>
-                </a:solidFill>
-                <a:latin typeface="Malgun Gothic"/>
-                <a:ea typeface="Malgun Gothic"/>
-                <a:cs typeface="Malgun Gothic"/>
-              </a:rPr>
-              <a:t>Glyceraldehyde-3-phosphate dehydrogenase</a:t>
-            </a:r>
-            <a:r>
-              <a:rPr sz="1400" b="0" i="0">
-                <a:solidFill>
-                  <a:srgbClr val="11202B"/>
-                </a:solidFill>
-                <a:latin typeface="Malgun Gothic"/>
-                <a:ea typeface="Malgun Gothic"/>
-                <a:cs typeface="Malgun Gothic"/>
-              </a:rPr>
-              <a:t>. 산화와 인산화가 동시에 일어난다. NAD⁺가 NADH로 환원되고, 무기인산이 결합해 전이 능력이 큰 화합물(−49.4 kJ/mol)이 만들어진다. 7. 1,3-Bisphosphoglycerate → 3-phosphoglycerate. Phosphoglycerate kinase. </a:t>
-            </a:r>
-            <a:r>
-              <a:rPr sz="1400" b="1" i="0">
-                <a:solidFill>
-                  <a:srgbClr val="11202B"/>
-                </a:solidFill>
-                <a:latin typeface="Malgun Gothic"/>
-                <a:ea typeface="Malgun Gothic"/>
-                <a:cs typeface="Malgun Gothic"/>
-              </a:rPr>
-              <a:t>ATP 생성.</a:t>
-            </a:r>
-            <a:r>
-              <a:rPr sz="1400" b="0" i="0">
-                <a:solidFill>
-                  <a:srgbClr val="11202B"/>
-                </a:solidFill>
-                <a:latin typeface="Malgun Gothic"/>
-                <a:ea typeface="Malgun Gothic"/>
-                <a:cs typeface="Malgun Gothic"/>
-              </a:rPr>
-              <a:t> 기질의 인산기를 ADP로 직접 넘기므로 substrate-level phosphorylation이다. 8. 3-Phosphoglycerate ⇌ 2-phosphoglycerate. Phosphoglycerate mutase. 9. 2-Phosphoglycerate → </a:t>
-            </a:r>
-            <a:r>
-              <a:rPr sz="1400" b="1" i="0">
+              <a:rPr sz="1800" b="0" i="0">
+                <a:solidFill>
+                  <a:srgbClr val="11202B"/>
+                </a:solidFill>
+                <a:latin typeface="Malgun Gothic"/>
+                <a:ea typeface="Malgun Gothic"/>
+                <a:cs typeface="Malgun Gothic"/>
+              </a:rPr>
+              <a:t>4. 2-Phosphoglycerate → </a:t>
+            </a:r>
+            <a:r>
+              <a:rPr sz="1800" b="1" i="0">
                 <a:solidFill>
                   <a:srgbClr val="11202B"/>
                 </a:solidFill>
@@ -5188,59 +5144,15 @@
               <a:t>phosphoenolpyruvate</a:t>
             </a:r>
             <a:r>
-              <a:rPr sz="1400" b="0" i="0">
-                <a:solidFill>
-                  <a:srgbClr val="11202B"/>
-                </a:solidFill>
-                <a:latin typeface="Malgun Gothic"/>
-                <a:ea typeface="Malgun Gothic"/>
-                <a:cs typeface="Malgun Gothic"/>
-              </a:rPr>
-              <a:t>. Enolase. 물이 떨어져 나가 전이 능력이 −61.9 kJ/mol로 매우 큰 화합물이 된다. 10. Phosphoenolpyruvate → pyruvate. </a:t>
-            </a:r>
-            <a:r>
-              <a:rPr sz="1400" b="1" i="0">
-                <a:solidFill>
-                  <a:srgbClr val="11202B"/>
-                </a:solidFill>
-                <a:latin typeface="Malgun Gothic"/>
-                <a:ea typeface="Malgun Gothic"/>
-                <a:cs typeface="Malgun Gothic"/>
-              </a:rPr>
-              <a:t>Pyruvate kinase</a:t>
-            </a:r>
-            <a:r>
-              <a:rPr sz="1400" b="0" i="0">
-                <a:solidFill>
-                  <a:srgbClr val="11202B"/>
-                </a:solidFill>
-                <a:latin typeface="Malgun Gothic"/>
-                <a:ea typeface="Malgun Gothic"/>
-                <a:cs typeface="Malgun Gothic"/>
-              </a:rPr>
-              <a:t>. </a:t>
-            </a:r>
-            <a:r>
-              <a:rPr sz="1400" b="1" i="0">
-                <a:solidFill>
-                  <a:srgbClr val="11202B"/>
-                </a:solidFill>
-                <a:latin typeface="Malgun Gothic"/>
-                <a:ea typeface="Malgun Gothic"/>
-                <a:cs typeface="Malgun Gothic"/>
-              </a:rPr>
-              <a:t>ATP 생성.</a:t>
-            </a:r>
-            <a:r>
-              <a:rPr sz="1400" b="0" i="0">
-                <a:solidFill>
-                  <a:srgbClr val="11202B"/>
-                </a:solidFill>
-                <a:latin typeface="Malgun Gothic"/>
-                <a:ea typeface="Malgun Gothic"/>
-                <a:cs typeface="Malgun Gothic"/>
-              </a:rPr>
-              <a:t> 비가역이다.</a:t>
+              <a:rPr sz="1800" b="0" i="0">
+                <a:solidFill>
+                  <a:srgbClr val="11202B"/>
+                </a:solidFill>
+                <a:latin typeface="Malgun Gothic"/>
+                <a:ea typeface="Malgun Gothic"/>
+                <a:cs typeface="Malgun Gothic"/>
+              </a:rPr>
+              <a:t>. Enolase. 물이 떨어져 나가 전이 능력이 −61.9 kJ/mol로 매우 큰 화합물이 된다.</a:t>
             </a:r>
           </a:p>
           <a:p>
@@ -5250,7 +5162,7 @@
               </a:spcAft>
             </a:pPr>
             <a:r>
-              <a:rPr sz="1400" b="1" i="0">
+              <a:rPr sz="1800" b="1" i="0">
                 <a:solidFill>
                   <a:srgbClr val="F2B705"/>
                 </a:solidFill>
@@ -5261,15 +5173,59 @@
               <a:t>•  </a:t>
             </a:r>
             <a:r>
-              <a:rPr sz="1400" b="0" i="0">
-                <a:solidFill>
-                  <a:srgbClr val="11202B"/>
-                </a:solidFill>
-                <a:latin typeface="Malgun Gothic"/>
-                <a:ea typeface="Malgun Gothic"/>
-                <a:cs typeface="Malgun Gothic"/>
-              </a:rPr>
-              <a:t>알짜 수지는 다음과 같다.</a:t>
+              <a:rPr sz="1800" b="0" i="0">
+                <a:solidFill>
+                  <a:srgbClr val="11202B"/>
+                </a:solidFill>
+                <a:latin typeface="Malgun Gothic"/>
+                <a:ea typeface="Malgun Gothic"/>
+                <a:cs typeface="Malgun Gothic"/>
+              </a:rPr>
+              <a:t>5. Phosphoenolpyruvate → pyruvate. </a:t>
+            </a:r>
+            <a:r>
+              <a:rPr sz="1800" b="1" i="0">
+                <a:solidFill>
+                  <a:srgbClr val="11202B"/>
+                </a:solidFill>
+                <a:latin typeface="Malgun Gothic"/>
+                <a:ea typeface="Malgun Gothic"/>
+                <a:cs typeface="Malgun Gothic"/>
+              </a:rPr>
+              <a:t>Pyruvate kinase</a:t>
+            </a:r>
+            <a:r>
+              <a:rPr sz="1800" b="0" i="0">
+                <a:solidFill>
+                  <a:srgbClr val="11202B"/>
+                </a:solidFill>
+                <a:latin typeface="Malgun Gothic"/>
+                <a:ea typeface="Malgun Gothic"/>
+                <a:cs typeface="Malgun Gothic"/>
+              </a:rPr>
+              <a:t>. </a:t>
+            </a:r>
+            <a:r>
+              <a:rPr sz="1800" b="1" i="0">
+                <a:solidFill>
+                  <a:srgbClr val="11202B"/>
+                </a:solidFill>
+                <a:latin typeface="Malgun Gothic"/>
+                <a:ea typeface="Malgun Gothic"/>
+                <a:cs typeface="Malgun Gothic"/>
+              </a:rPr>
+              <a:t>ATP 생성.</a:t>
+            </a:r>
+            <a:r>
+              <a:rPr sz="1800" b="0" i="0">
+                <a:solidFill>
+                  <a:srgbClr val="11202B"/>
+                </a:solidFill>
+                <a:latin typeface="Malgun Gothic"/>
+                <a:ea typeface="Malgun Gothic"/>
+                <a:cs typeface="Malgun Gothic"/>
+              </a:rPr>
+              <a:t> 비가역이다.</a:t>
             </a:r>
           </a:p>
           <a:p>
@@ -5279,7 +5235,7 @@
               </a:spcAft>
             </a:pPr>
             <a:r>
-              <a:rPr sz="1400" b="1" i="0">
+              <a:rPr sz="1800" b="1" i="0">
                 <a:solidFill>
                   <a:srgbClr val="F2B705"/>
                 </a:solidFill>
@@ -5290,15 +5246,15 @@
               <a:t>•  </a:t>
             </a:r>
             <a:r>
-              <a:rPr sz="1400" b="0" i="0">
-                <a:solidFill>
-                  <a:srgbClr val="11202B"/>
-                </a:solidFill>
-                <a:latin typeface="Malgun Gothic"/>
-                <a:ea typeface="Malgun Gothic"/>
-                <a:cs typeface="Malgun Gothic"/>
-              </a:rPr>
-              <a:t>Glucose + 2 NAD⁺ + 2 ADP + 2 Pᵢ → 2 pyruvate + 2 NADH + 2 H⁺ + 2 ATP + 2 H₂O</a:t>
+              <a:rPr sz="1800" b="0" i="0">
+                <a:solidFill>
+                  <a:srgbClr val="11202B"/>
+                </a:solidFill>
+                <a:latin typeface="Malgun Gothic"/>
+                <a:ea typeface="Malgun Gothic"/>
+                <a:cs typeface="Malgun Gothic"/>
+              </a:rPr>
+              <a:t>알짜 수지는 다음과 같다.</a:t>
             </a:r>
           </a:p>
           <a:p>
@@ -5308,7 +5264,7 @@
               </a:spcAft>
             </a:pPr>
             <a:r>
-              <a:rPr sz="1400" b="1" i="0">
+              <a:rPr sz="1800" b="1" i="0">
                 <a:solidFill>
                   <a:srgbClr val="F2B705"/>
                 </a:solidFill>
@@ -5319,7 +5275,36 @@
               <a:t>•  </a:t>
             </a:r>
             <a:r>
-              <a:rPr sz="1400" b="0" i="0">
+              <a:rPr sz="1800" b="0" i="0">
+                <a:solidFill>
+                  <a:srgbClr val="11202B"/>
+                </a:solidFill>
+                <a:latin typeface="Malgun Gothic"/>
+                <a:ea typeface="Malgun Gothic"/>
+                <a:cs typeface="Malgun Gothic"/>
+              </a:rPr>
+              <a:t>Glucose + 2 NAD⁺ + 2 ADP + 2 Pᵢ → 2 pyruvate + 2 NADH + 2 H⁺ + 2 ATP + 2 H₂O</a:t>
+            </a:r>
+          </a:p>
+          <a:p>
+            <a:pPr>
+              <a:spcAft>
+                <a:spcPts val="900"/>
+              </a:spcAft>
+            </a:pPr>
+            <a:r>
+              <a:rPr sz="1800" b="1" i="0">
+                <a:solidFill>
+                  <a:srgbClr val="F2B705"/>
+                </a:solidFill>
+                <a:latin typeface="Malgun Gothic"/>
+                <a:ea typeface="Malgun Gothic"/>
+                <a:cs typeface="Malgun Gothic"/>
+              </a:rPr>
+              <a:t>•  </a:t>
+            </a:r>
+            <a:r>
+              <a:rPr sz="1800" b="0" i="0">
                 <a:solidFill>
                   <a:srgbClr val="11202B"/>
                 </a:solidFill>
@@ -5330,7 +5315,7 @@
               <a:t>ATP 네 개가 만들어지고 두 개가 소모되어 </a:t>
             </a:r>
             <a:r>
-              <a:rPr sz="1400" b="1" i="0">
+              <a:rPr sz="1800" b="1" i="0">
                 <a:solidFill>
                   <a:srgbClr val="11202B"/>
                 </a:solidFill>
@@ -5341,7 +5326,7 @@
               <a:t>알짜 2개</a:t>
             </a:r>
             <a:r>
-              <a:rPr sz="1400" b="0" i="0">
+              <a:rPr sz="1800" b="0" i="0">
                 <a:solidFill>
                   <a:srgbClr val="11202B"/>
                 </a:solidFill>
@@ -9273,6 +9258,356 @@
               <a:t>은 acetyl-CoA의 두 탄소를 CO₂ 두 개로 산화하는 여덟 단계의 순환이다. 핵심 구조는 다음과 같다.</a:t>
             </a:r>
           </a:p>
+          <a:p>
+            <a:pPr>
+              <a:spcAft>
+                <a:spcPts val="900"/>
+              </a:spcAft>
+            </a:pPr>
+            <a:r>
+              <a:rPr sz="1400" b="1" i="0">
+                <a:solidFill>
+                  <a:srgbClr val="F2B705"/>
+                </a:solidFill>
+                <a:latin typeface="Malgun Gothic"/>
+                <a:ea typeface="Malgun Gothic"/>
+                <a:cs typeface="Malgun Gothic"/>
+              </a:rPr>
+              <a:t>•  </a:t>
+            </a:r>
+            <a:r>
+              <a:rPr sz="1400" b="0" i="0">
+                <a:solidFill>
+                  <a:srgbClr val="11202B"/>
+                </a:solidFill>
+                <a:latin typeface="Malgun Gothic"/>
+                <a:ea typeface="Malgun Gothic"/>
+                <a:cs typeface="Malgun Gothic"/>
+              </a:rPr>
+              <a:t>1. Acetyl-CoA(C2)가 oxaloacetate(C4)와 결합해 </a:t>
+            </a:r>
+            <a:r>
+              <a:rPr sz="1400" b="1" i="0">
+                <a:solidFill>
+                  <a:srgbClr val="11202B"/>
+                </a:solidFill>
+                <a:latin typeface="Malgun Gothic"/>
+                <a:ea typeface="Malgun Gothic"/>
+                <a:cs typeface="Malgun Gothic"/>
+              </a:rPr>
+              <a:t>citrate</a:t>
+            </a:r>
+            <a:r>
+              <a:rPr sz="1400" b="0" i="0">
+                <a:solidFill>
+                  <a:srgbClr val="11202B"/>
+                </a:solidFill>
+                <a:latin typeface="Malgun Gothic"/>
+                <a:ea typeface="Malgun Gothic"/>
+                <a:cs typeface="Malgun Gothic"/>
+              </a:rPr>
+              <a:t>(C6)가 된다. </a:t>
+            </a:r>
+            <a:r>
+              <a:rPr sz="1400" b="1" i="0">
+                <a:solidFill>
+                  <a:srgbClr val="11202B"/>
+                </a:solidFill>
+                <a:latin typeface="Malgun Gothic"/>
+                <a:ea typeface="Malgun Gothic"/>
+                <a:cs typeface="Malgun Gothic"/>
+              </a:rPr>
+              <a:t>Citrate synthase</a:t>
+            </a:r>
+            <a:r>
+              <a:rPr sz="1400" b="0" i="0">
+                <a:solidFill>
+                  <a:srgbClr val="11202B"/>
+                </a:solidFill>
+                <a:latin typeface="Malgun Gothic"/>
+                <a:ea typeface="Malgun Gothic"/>
+                <a:cs typeface="Malgun Gothic"/>
+              </a:rPr>
+              <a:t>. 비가역이며 유입량을 정한다.</a:t>
+            </a:r>
+          </a:p>
+          <a:p>
+            <a:pPr>
+              <a:spcAft>
+                <a:spcPts val="900"/>
+              </a:spcAft>
+            </a:pPr>
+            <a:r>
+              <a:rPr sz="1400" b="1" i="0">
+                <a:solidFill>
+                  <a:srgbClr val="F2B705"/>
+                </a:solidFill>
+                <a:latin typeface="Malgun Gothic"/>
+                <a:ea typeface="Malgun Gothic"/>
+                <a:cs typeface="Malgun Gothic"/>
+              </a:rPr>
+              <a:t>•  </a:t>
+            </a:r>
+            <a:r>
+              <a:rPr sz="1400" b="0" i="0">
+                <a:solidFill>
+                  <a:srgbClr val="11202B"/>
+                </a:solidFill>
+                <a:latin typeface="Malgun Gothic"/>
+                <a:ea typeface="Malgun Gothic"/>
+                <a:cs typeface="Malgun Gothic"/>
+              </a:rPr>
+              <a:t>2. Citrate → isocitrate. Aconitase.</a:t>
+            </a:r>
+          </a:p>
+          <a:p>
+            <a:pPr>
+              <a:spcAft>
+                <a:spcPts val="900"/>
+              </a:spcAft>
+            </a:pPr>
+            <a:r>
+              <a:rPr sz="1400" b="1" i="0">
+                <a:solidFill>
+                  <a:srgbClr val="F2B705"/>
+                </a:solidFill>
+                <a:latin typeface="Malgun Gothic"/>
+                <a:ea typeface="Malgun Gothic"/>
+                <a:cs typeface="Malgun Gothic"/>
+              </a:rPr>
+              <a:t>•  </a:t>
+            </a:r>
+            <a:r>
+              <a:rPr sz="1400" b="0" i="0">
+                <a:solidFill>
+                  <a:srgbClr val="11202B"/>
+                </a:solidFill>
+                <a:latin typeface="Malgun Gothic"/>
+                <a:ea typeface="Malgun Gothic"/>
+                <a:cs typeface="Malgun Gothic"/>
+              </a:rPr>
+              <a:t>3. Isocitrate → α-ketoglutarate(C5) + CO₂ + NADH. </a:t>
+            </a:r>
+            <a:r>
+              <a:rPr sz="1400" b="1" i="0">
+                <a:solidFill>
+                  <a:srgbClr val="11202B"/>
+                </a:solidFill>
+                <a:latin typeface="Malgun Gothic"/>
+                <a:ea typeface="Malgun Gothic"/>
+                <a:cs typeface="Malgun Gothic"/>
+              </a:rPr>
+              <a:t>Isocitrate dehydrogenase</a:t>
+            </a:r>
+            <a:r>
+              <a:rPr sz="1400" b="0" i="0">
+                <a:solidFill>
+                  <a:srgbClr val="11202B"/>
+                </a:solidFill>
+                <a:latin typeface="Malgun Gothic"/>
+                <a:ea typeface="Malgun Gothic"/>
+                <a:cs typeface="Malgun Gothic"/>
+              </a:rPr>
+              <a:t>. 첫 decarboxylation이며 </a:t>
+            </a:r>
+            <a:r>
+              <a:rPr sz="1400" b="1" i="0">
+                <a:solidFill>
+                  <a:srgbClr val="11202B"/>
+                </a:solidFill>
+                <a:latin typeface="Malgun Gothic"/>
+                <a:ea typeface="Malgun Gothic"/>
+                <a:cs typeface="Malgun Gothic"/>
+              </a:rPr>
+              <a:t>순환의 rate-limiting step</a:t>
+            </a:r>
+            <a:r>
+              <a:rPr sz="1400" b="0" i="0">
+                <a:solidFill>
+                  <a:srgbClr val="11202B"/>
+                </a:solidFill>
+                <a:latin typeface="Malgun Gothic"/>
+                <a:ea typeface="Malgun Gothic"/>
+                <a:cs typeface="Malgun Gothic"/>
+              </a:rPr>
+              <a:t>이다. ADP에 활성화되고 NADH·ATP에 억제된다.</a:t>
+            </a:r>
+          </a:p>
+          <a:p>
+            <a:pPr>
+              <a:spcAft>
+                <a:spcPts val="900"/>
+              </a:spcAft>
+            </a:pPr>
+            <a:r>
+              <a:rPr sz="1400" b="1" i="0">
+                <a:solidFill>
+                  <a:srgbClr val="F2B705"/>
+                </a:solidFill>
+                <a:latin typeface="Malgun Gothic"/>
+                <a:ea typeface="Malgun Gothic"/>
+                <a:cs typeface="Malgun Gothic"/>
+              </a:rPr>
+              <a:t>•  </a:t>
+            </a:r>
+            <a:r>
+              <a:rPr sz="1400" b="0" i="0">
+                <a:solidFill>
+                  <a:srgbClr val="11202B"/>
+                </a:solidFill>
+                <a:latin typeface="Malgun Gothic"/>
+                <a:ea typeface="Malgun Gothic"/>
+                <a:cs typeface="Malgun Gothic"/>
+              </a:rPr>
+              <a:t>4. α-Ketoglutarate → succinyl-CoA(C4) + CO₂ + NADH. </a:t>
+            </a:r>
+            <a:r>
+              <a:rPr sz="1400" b="1" i="0">
+                <a:solidFill>
+                  <a:srgbClr val="11202B"/>
+                </a:solidFill>
+                <a:latin typeface="Malgun Gothic"/>
+                <a:ea typeface="Malgun Gothic"/>
+                <a:cs typeface="Malgun Gothic"/>
+              </a:rPr>
+              <a:t>α-Ketoglutarate dehydrogenase</a:t>
+            </a:r>
+            <a:r>
+              <a:rPr sz="1400" b="0" i="0">
+                <a:solidFill>
+                  <a:srgbClr val="11202B"/>
+                </a:solidFill>
+                <a:latin typeface="Malgun Gothic"/>
+                <a:ea typeface="Malgun Gothic"/>
+                <a:cs typeface="Malgun Gothic"/>
+              </a:rPr>
+              <a:t>. PDH와 같은 구조와 보조인자를 쓴다. 비가역.</a:t>
+            </a:r>
+          </a:p>
+          <a:p>
+            <a:pPr>
+              <a:spcAft>
+                <a:spcPts val="900"/>
+              </a:spcAft>
+            </a:pPr>
+            <a:r>
+              <a:rPr sz="1400" b="1" i="0">
+                <a:solidFill>
+                  <a:srgbClr val="F2B705"/>
+                </a:solidFill>
+                <a:latin typeface="Malgun Gothic"/>
+                <a:ea typeface="Malgun Gothic"/>
+                <a:cs typeface="Malgun Gothic"/>
+              </a:rPr>
+              <a:t>•  </a:t>
+            </a:r>
+            <a:r>
+              <a:rPr sz="1400" b="0" i="0">
+                <a:solidFill>
+                  <a:srgbClr val="11202B"/>
+                </a:solidFill>
+                <a:latin typeface="Malgun Gothic"/>
+                <a:ea typeface="Malgun Gothic"/>
+                <a:cs typeface="Malgun Gothic"/>
+              </a:rPr>
+              <a:t>5. Succinyl-CoA → succinate + </a:t>
+            </a:r>
+            <a:r>
+              <a:rPr sz="1400" b="1" i="0">
+                <a:solidFill>
+                  <a:srgbClr val="11202B"/>
+                </a:solidFill>
+                <a:latin typeface="Malgun Gothic"/>
+                <a:ea typeface="Malgun Gothic"/>
+                <a:cs typeface="Malgun Gothic"/>
+              </a:rPr>
+              <a:t>GTP</a:t>
+            </a:r>
+            <a:r>
+              <a:rPr sz="1400" b="0" i="0">
+                <a:solidFill>
+                  <a:srgbClr val="11202B"/>
+                </a:solidFill>
+                <a:latin typeface="Malgun Gothic"/>
+                <a:ea typeface="Malgun Gothic"/>
+                <a:cs typeface="Malgun Gothic"/>
+              </a:rPr>
+              <a:t>. Succinyl-CoA synthetase. 순환에서 유일한 substrate-level phosphorylation.</a:t>
+            </a:r>
+          </a:p>
+          <a:p>
+            <a:pPr>
+              <a:spcAft>
+                <a:spcPts val="900"/>
+              </a:spcAft>
+            </a:pPr>
+            <a:r>
+              <a:rPr sz="1400" b="1" i="0">
+                <a:solidFill>
+                  <a:srgbClr val="F2B705"/>
+                </a:solidFill>
+                <a:latin typeface="Malgun Gothic"/>
+                <a:ea typeface="Malgun Gothic"/>
+                <a:cs typeface="Malgun Gothic"/>
+              </a:rPr>
+              <a:t>•  </a:t>
+            </a:r>
+            <a:r>
+              <a:rPr sz="1400" b="0" i="0">
+                <a:solidFill>
+                  <a:srgbClr val="11202B"/>
+                </a:solidFill>
+                <a:latin typeface="Malgun Gothic"/>
+                <a:ea typeface="Malgun Gothic"/>
+                <a:cs typeface="Malgun Gothic"/>
+              </a:rPr>
+              <a:t>6. Succinate → fumarate + </a:t>
+            </a:r>
+            <a:r>
+              <a:rPr sz="1400" b="1" i="0">
+                <a:solidFill>
+                  <a:srgbClr val="11202B"/>
+                </a:solidFill>
+                <a:latin typeface="Malgun Gothic"/>
+                <a:ea typeface="Malgun Gothic"/>
+                <a:cs typeface="Malgun Gothic"/>
+              </a:rPr>
+              <a:t>FADH₂</a:t>
+            </a:r>
+            <a:r>
+              <a:rPr sz="1400" b="0" i="0">
+                <a:solidFill>
+                  <a:srgbClr val="11202B"/>
+                </a:solidFill>
+                <a:latin typeface="Malgun Gothic"/>
+                <a:ea typeface="Malgun Gothic"/>
+                <a:cs typeface="Malgun Gothic"/>
+              </a:rPr>
+              <a:t>. </a:t>
+            </a:r>
+            <a:r>
+              <a:rPr sz="1400" b="1" i="0">
+                <a:solidFill>
+                  <a:srgbClr val="11202B"/>
+                </a:solidFill>
+                <a:latin typeface="Malgun Gothic"/>
+                <a:ea typeface="Malgun Gothic"/>
+                <a:cs typeface="Malgun Gothic"/>
+              </a:rPr>
+              <a:t>Succinate dehydrogenase</a:t>
+            </a:r>
+            <a:r>
+              <a:rPr sz="1400" b="0" i="0">
+                <a:solidFill>
+                  <a:srgbClr val="11202B"/>
+                </a:solidFill>
+                <a:latin typeface="Malgun Gothic"/>
+                <a:ea typeface="Malgun Gothic"/>
+                <a:cs typeface="Malgun Gothic"/>
+              </a:rPr>
+              <a:t>. 이 효소만 내막에 박혀 있고 electron transport chain의 복합체 II와 동일하다.</a:t>
+            </a:r>
+          </a:p>
         </p:txBody>
       </p:sp>
     </p:spTree>
@@ -10046,7 +10381,7 @@
               </a:spcAft>
             </a:pPr>
             <a:r>
-              <a:rPr sz="1400" b="1" i="0">
+              <a:rPr sz="2000" b="1" i="0">
                 <a:solidFill>
                   <a:srgbClr val="F2B705"/>
                 </a:solidFill>
@@ -10057,191 +10392,15 @@
               <a:t>•  </a:t>
             </a:r>
             <a:r>
-              <a:rPr sz="1400" b="0" i="0">
-                <a:solidFill>
-                  <a:srgbClr val="11202B"/>
-                </a:solidFill>
-                <a:latin typeface="Malgun Gothic"/>
-                <a:ea typeface="Malgun Gothic"/>
-                <a:cs typeface="Malgun Gothic"/>
-              </a:rPr>
-              <a:t>1. Acetyl-CoA(C2)가 oxaloacetate(C4)와 결합해 </a:t>
-            </a:r>
-            <a:r>
-              <a:rPr sz="1400" b="1" i="0">
-                <a:solidFill>
-                  <a:srgbClr val="11202B"/>
-                </a:solidFill>
-                <a:latin typeface="Malgun Gothic"/>
-                <a:ea typeface="Malgun Gothic"/>
-                <a:cs typeface="Malgun Gothic"/>
-              </a:rPr>
-              <a:t>citrate</a:t>
-            </a:r>
-            <a:r>
-              <a:rPr sz="1400" b="0" i="0">
-                <a:solidFill>
-                  <a:srgbClr val="11202B"/>
-                </a:solidFill>
-                <a:latin typeface="Malgun Gothic"/>
-                <a:ea typeface="Malgun Gothic"/>
-                <a:cs typeface="Malgun Gothic"/>
-              </a:rPr>
-              <a:t>(C6)가 된다. </a:t>
-            </a:r>
-            <a:r>
-              <a:rPr sz="1400" b="1" i="0">
-                <a:solidFill>
-                  <a:srgbClr val="11202B"/>
-                </a:solidFill>
-                <a:latin typeface="Malgun Gothic"/>
-                <a:ea typeface="Malgun Gothic"/>
-                <a:cs typeface="Malgun Gothic"/>
-              </a:rPr>
-              <a:t>Citrate synthase</a:t>
-            </a:r>
-            <a:r>
-              <a:rPr sz="1400" b="0" i="0">
-                <a:solidFill>
-                  <a:srgbClr val="11202B"/>
-                </a:solidFill>
-                <a:latin typeface="Malgun Gothic"/>
-                <a:ea typeface="Malgun Gothic"/>
-                <a:cs typeface="Malgun Gothic"/>
-              </a:rPr>
-              <a:t>. 비가역이며 유입량을 정한다. 2. Citrate → isocitrate. Aconitase. 3. Isocitrate → α-ketoglutarate(C5) + CO₂ + NADH. </a:t>
-            </a:r>
-            <a:r>
-              <a:rPr sz="1400" b="1" i="0">
-                <a:solidFill>
-                  <a:srgbClr val="11202B"/>
-                </a:solidFill>
-                <a:latin typeface="Malgun Gothic"/>
-                <a:ea typeface="Malgun Gothic"/>
-                <a:cs typeface="Malgun Gothic"/>
-              </a:rPr>
-              <a:t>Isocitrate dehydrogenase</a:t>
-            </a:r>
-            <a:r>
-              <a:rPr sz="1400" b="0" i="0">
-                <a:solidFill>
-                  <a:srgbClr val="11202B"/>
-                </a:solidFill>
-                <a:latin typeface="Malgun Gothic"/>
-                <a:ea typeface="Malgun Gothic"/>
-                <a:cs typeface="Malgun Gothic"/>
-              </a:rPr>
-              <a:t>. 첫 decarboxylation이며 </a:t>
-            </a:r>
-            <a:r>
-              <a:rPr sz="1400" b="1" i="0">
-                <a:solidFill>
-                  <a:srgbClr val="11202B"/>
-                </a:solidFill>
-                <a:latin typeface="Malgun Gothic"/>
-                <a:ea typeface="Malgun Gothic"/>
-                <a:cs typeface="Malgun Gothic"/>
-              </a:rPr>
-              <a:t>순환의 rate-limiting step</a:t>
-            </a:r>
-            <a:r>
-              <a:rPr sz="1400" b="0" i="0">
-                <a:solidFill>
-                  <a:srgbClr val="11202B"/>
-                </a:solidFill>
-                <a:latin typeface="Malgun Gothic"/>
-                <a:ea typeface="Malgun Gothic"/>
-                <a:cs typeface="Malgun Gothic"/>
-              </a:rPr>
-              <a:t>이다. ADP에 활성화되고 NADH·ATP에 억제된다. 4. α-Ketoglutarate → succinyl-CoA(C4) + CO₂ + NADH. </a:t>
-            </a:r>
-            <a:r>
-              <a:rPr sz="1400" b="1" i="0">
-                <a:solidFill>
-                  <a:srgbClr val="11202B"/>
-                </a:solidFill>
-                <a:latin typeface="Malgun Gothic"/>
-                <a:ea typeface="Malgun Gothic"/>
-                <a:cs typeface="Malgun Gothic"/>
-              </a:rPr>
-              <a:t>α-Ketoglutarate dehydrogenase</a:t>
-            </a:r>
-            <a:r>
-              <a:rPr sz="1400" b="0" i="0">
-                <a:solidFill>
-                  <a:srgbClr val="11202B"/>
-                </a:solidFill>
-                <a:latin typeface="Malgun Gothic"/>
-                <a:ea typeface="Malgun Gothic"/>
-                <a:cs typeface="Malgun Gothic"/>
-              </a:rPr>
-              <a:t>. PDH와 같은 구조와 보조인자를 쓴다. 비가역. 5. Succinyl-CoA → succinate + </a:t>
-            </a:r>
-            <a:r>
-              <a:rPr sz="1400" b="1" i="0">
-                <a:solidFill>
-                  <a:srgbClr val="11202B"/>
-                </a:solidFill>
-                <a:latin typeface="Malgun Gothic"/>
-                <a:ea typeface="Malgun Gothic"/>
-                <a:cs typeface="Malgun Gothic"/>
-              </a:rPr>
-              <a:t>GTP</a:t>
-            </a:r>
-            <a:r>
-              <a:rPr sz="1400" b="0" i="0">
-                <a:solidFill>
-                  <a:srgbClr val="11202B"/>
-                </a:solidFill>
-                <a:latin typeface="Malgun Gothic"/>
-                <a:ea typeface="Malgun Gothic"/>
-                <a:cs typeface="Malgun Gothic"/>
-              </a:rPr>
-              <a:t>. Succinyl-CoA synthetase. 순환에서 유일한 substrate-level phosphorylation. 6. Succinate → fumarate + </a:t>
-            </a:r>
-            <a:r>
-              <a:rPr sz="1400" b="1" i="0">
-                <a:solidFill>
-                  <a:srgbClr val="11202B"/>
-                </a:solidFill>
-                <a:latin typeface="Malgun Gothic"/>
-                <a:ea typeface="Malgun Gothic"/>
-                <a:cs typeface="Malgun Gothic"/>
-              </a:rPr>
-              <a:t>FADH₂</a:t>
-            </a:r>
-            <a:r>
-              <a:rPr sz="1400" b="0" i="0">
-                <a:solidFill>
-                  <a:srgbClr val="11202B"/>
-                </a:solidFill>
-                <a:latin typeface="Malgun Gothic"/>
-                <a:ea typeface="Malgun Gothic"/>
-                <a:cs typeface="Malgun Gothic"/>
-              </a:rPr>
-              <a:t>. </a:t>
-            </a:r>
-            <a:r>
-              <a:rPr sz="1400" b="1" i="0">
-                <a:solidFill>
-                  <a:srgbClr val="11202B"/>
-                </a:solidFill>
-                <a:latin typeface="Malgun Gothic"/>
-                <a:ea typeface="Malgun Gothic"/>
-                <a:cs typeface="Malgun Gothic"/>
-              </a:rPr>
-              <a:t>Succinate dehydrogenase</a:t>
-            </a:r>
-            <a:r>
-              <a:rPr sz="1400" b="0" i="0">
-                <a:solidFill>
-                  <a:srgbClr val="11202B"/>
-                </a:solidFill>
-                <a:latin typeface="Malgun Gothic"/>
-                <a:ea typeface="Malgun Gothic"/>
-                <a:cs typeface="Malgun Gothic"/>
-              </a:rPr>
-              <a:t>. 이 효소만 내막에 박혀 있고 electron transport chain의 복합체 II와 동일하다. 7. Fumarate → malate. Fumarase. 8. Malate → oxaloacetate + NADH. Malate dehydrogenase. 순환이 닫힌다.</a:t>
+              <a:rPr sz="2000" b="0" i="0">
+                <a:solidFill>
+                  <a:srgbClr val="11202B"/>
+                </a:solidFill>
+                <a:latin typeface="Malgun Gothic"/>
+                <a:ea typeface="Malgun Gothic"/>
+                <a:cs typeface="Malgun Gothic"/>
+              </a:rPr>
+              <a:t>7. Fumarate → malate. Fumarase.</a:t>
             </a:r>
           </a:p>
           <a:p>
@@ -10251,7 +10410,7 @@
               </a:spcAft>
             </a:pPr>
             <a:r>
-              <a:rPr sz="1400" b="1" i="0">
+              <a:rPr sz="2000" b="1" i="0">
                 <a:solidFill>
                   <a:srgbClr val="F2B705"/>
                 </a:solidFill>
@@ -10262,7 +10421,36 @@
               <a:t>•  </a:t>
             </a:r>
             <a:r>
-              <a:rPr sz="1400" b="0" i="0">
+              <a:rPr sz="2000" b="0" i="0">
+                <a:solidFill>
+                  <a:srgbClr val="11202B"/>
+                </a:solidFill>
+                <a:latin typeface="Malgun Gothic"/>
+                <a:ea typeface="Malgun Gothic"/>
+                <a:cs typeface="Malgun Gothic"/>
+              </a:rPr>
+              <a:t>8. Malate → oxaloacetate + NADH. Malate dehydrogenase. 순환이 닫힌다.</a:t>
+            </a:r>
+          </a:p>
+          <a:p>
+            <a:pPr>
+              <a:spcAft>
+                <a:spcPts val="900"/>
+              </a:spcAft>
+            </a:pPr>
+            <a:r>
+              <a:rPr sz="2000" b="1" i="0">
+                <a:solidFill>
+                  <a:srgbClr val="F2B705"/>
+                </a:solidFill>
+                <a:latin typeface="Malgun Gothic"/>
+                <a:ea typeface="Malgun Gothic"/>
+                <a:cs typeface="Malgun Gothic"/>
+              </a:rPr>
+              <a:t>•  </a:t>
+            </a:r>
+            <a:r>
+              <a:rPr sz="2000" b="0" i="0">
                 <a:solidFill>
                   <a:srgbClr val="11202B"/>
                 </a:solidFill>
@@ -10273,7 +10461,7 @@
               <a:t>Acetyl-CoA 한 분자당 산물은 </a:t>
             </a:r>
             <a:r>
-              <a:rPr sz="1400" b="1" i="0">
+              <a:rPr sz="2000" b="1" i="0">
                 <a:solidFill>
                   <a:srgbClr val="11202B"/>
                 </a:solidFill>
@@ -10284,7 +10472,7 @@
               <a:t>CO₂ 2개, NADH 3개, FADH₂ 1개, GTP 1개</a:t>
             </a:r>
             <a:r>
-              <a:rPr sz="1400" b="0" i="0">
+              <a:rPr sz="2000" b="0" i="0">
                 <a:solidFill>
                   <a:srgbClr val="11202B"/>
                 </a:solidFill>
@@ -22553,11 +22741,40 @@
                 <a:ea typeface="Malgun Gothic"/>
                 <a:cs typeface="Malgun Gothic"/>
               </a:rPr>
-              <a:t> 우리가 숨 쉬는 산소가 모두 이 반응에서 나온다. 2. 전자가 plastoquinone, cytochrome b₆f 복합체, plastocyanin을 거쳐 흐르면서 </a:t>
-            </a:r>
+              <a:t> 우리가 숨 쉬는 산소가 모두 이 반응에서 나온다.</a:t>
+            </a:r>
+          </a:p>
+          <a:p>
+            <a:pPr>
+              <a:spcAft>
+                <a:spcPts val="900"/>
+              </a:spcAft>
+            </a:pPr>
             <a:r>
               <a:rPr sz="1400" b="1" i="0">
                 <a:solidFill>
+                  <a:srgbClr val="F2B705"/>
+                </a:solidFill>
+                <a:latin typeface="Malgun Gothic"/>
+                <a:ea typeface="Malgun Gothic"/>
+                <a:cs typeface="Malgun Gothic"/>
+              </a:rPr>
+              <a:t>•  </a:t>
+            </a:r>
+            <a:r>
+              <a:rPr sz="1400" b="0" i="0">
+                <a:solidFill>
+                  <a:srgbClr val="11202B"/>
+                </a:solidFill>
+                <a:latin typeface="Malgun Gothic"/>
+                <a:ea typeface="Malgun Gothic"/>
+                <a:cs typeface="Malgun Gothic"/>
+              </a:rPr>
+              <a:t>2. 전자가 plastoquinone, cytochrome b₆f 복합체, plastocyanin을 거쳐 흐르면서 </a:t>
+            </a:r>
+            <a:r>
+              <a:rPr sz="1400" b="1" i="0">
+                <a:solidFill>
                   <a:srgbClr val="11202B"/>
                 </a:solidFill>
                 <a:latin typeface="Malgun Gothic"/>
@@ -22566,6 +22783,24 @@
               </a:rPr>
               <a:t>양성자가 stroma에서 thylakoid 내부로 퍼내진다.</a:t>
             </a:r>
+          </a:p>
+          <a:p>
+            <a:pPr>
+              <a:spcAft>
+                <a:spcPts val="900"/>
+              </a:spcAft>
+            </a:pPr>
+            <a:r>
+              <a:rPr sz="1400" b="1" i="0">
+                <a:solidFill>
+                  <a:srgbClr val="F2B705"/>
+                </a:solidFill>
+                <a:latin typeface="Malgun Gothic"/>
+                <a:ea typeface="Malgun Gothic"/>
+                <a:cs typeface="Malgun Gothic"/>
+              </a:rPr>
+              <a:t>•  </a:t>
+            </a:r>
             <a:r>
               <a:rPr sz="1400" b="0" i="0">
                 <a:solidFill>
@@ -22575,7 +22810,7 @@
                 <a:ea typeface="Malgun Gothic"/>
                 <a:cs typeface="Malgun Gothic"/>
               </a:rPr>
-              <a:t> 3. </a:t>
+              <a:t>3. </a:t>
             </a:r>
             <a:r>
               <a:rPr sz="1400" b="1" i="0">
@@ -22619,7 +22854,36 @@
                 <a:ea typeface="Malgun Gothic"/>
                 <a:cs typeface="Malgun Gothic"/>
               </a:rPr>
-              <a:t>를 만든다. 4. Thylakoid 내부에 모인 양성자가 ATP synthase를 통해 stroma로 돌아가며 </a:t>
+              <a:t>를 만든다.</a:t>
+            </a:r>
+          </a:p>
+          <a:p>
+            <a:pPr>
+              <a:spcAft>
+                <a:spcPts val="900"/>
+              </a:spcAft>
+            </a:pPr>
+            <a:r>
+              <a:rPr sz="1400" b="1" i="0">
+                <a:solidFill>
+                  <a:srgbClr val="F2B705"/>
+                </a:solidFill>
+                <a:latin typeface="Malgun Gothic"/>
+                <a:ea typeface="Malgun Gothic"/>
+                <a:cs typeface="Malgun Gothic"/>
+              </a:rPr>
+              <a:t>•  </a:t>
+            </a:r>
+            <a:r>
+              <a:rPr sz="1400" b="0" i="0">
+                <a:solidFill>
+                  <a:srgbClr val="11202B"/>
+                </a:solidFill>
+                <a:latin typeface="Malgun Gothic"/>
+                <a:ea typeface="Malgun Gothic"/>
+                <a:cs typeface="Malgun Gothic"/>
+              </a:rPr>
+              <a:t>4. Thylakoid 내부에 모인 양성자가 ATP synthase를 통해 stroma로 돌아가며 </a:t>
             </a:r>
             <a:r>
               <a:rPr sz="1400" b="1" i="0">
@@ -32466,73 +32730,7 @@
                 <a:ea typeface="Malgun Gothic"/>
                 <a:cs typeface="Malgun Gothic"/>
               </a:rPr>
-              <a:t>(간은 glucokinase). ATP 소모. 인산기가 붙으면 음전하 때문에 막을 통과하지 못해 세포 안에 갇힌다. 2. Glucose-6-phosphate ⇌ fructose-6-phosphate. Phosphoglucose isomerase. 6각 고리가 5각 고리로 바뀌어 C1에 인산을 받을 준비가 된다. 3. Fructose-6-phosphate → </a:t>
-            </a:r>
-            <a:r>
-              <a:rPr sz="1400" b="1" i="0">
-                <a:solidFill>
-                  <a:srgbClr val="11202B"/>
-                </a:solidFill>
-                <a:latin typeface="Malgun Gothic"/>
-                <a:ea typeface="Malgun Gothic"/>
-                <a:cs typeface="Malgun Gothic"/>
-              </a:rPr>
-              <a:t>fructose-1,6-bisphosphate</a:t>
-            </a:r>
-            <a:r>
-              <a:rPr sz="1400" b="0" i="0">
-                <a:solidFill>
-                  <a:srgbClr val="11202B"/>
-                </a:solidFill>
-                <a:latin typeface="Malgun Gothic"/>
-                <a:ea typeface="Malgun Gothic"/>
-                <a:cs typeface="Malgun Gothic"/>
-              </a:rPr>
-              <a:t>. </a:t>
-            </a:r>
-            <a:r>
-              <a:rPr sz="1400" b="1" i="0">
-                <a:solidFill>
-                  <a:srgbClr val="11202B"/>
-                </a:solidFill>
-                <a:latin typeface="Malgun Gothic"/>
-                <a:ea typeface="Malgun Gothic"/>
-                <a:cs typeface="Malgun Gothic"/>
-              </a:rPr>
-              <a:t>Phosphofructokinase-1(PFK-1)</a:t>
-            </a:r>
-            <a:r>
-              <a:rPr sz="1400" b="0" i="0">
-                <a:solidFill>
-                  <a:srgbClr val="11202B"/>
-                </a:solidFill>
-                <a:latin typeface="Malgun Gothic"/>
-                <a:ea typeface="Malgun Gothic"/>
-                <a:cs typeface="Malgun Gothic"/>
-              </a:rPr>
-              <a:t>. ATP 소모. </a:t>
-            </a:r>
-            <a:r>
-              <a:rPr sz="1400" b="1" i="0">
-                <a:solidFill>
-                  <a:srgbClr val="11202B"/>
-                </a:solidFill>
-                <a:latin typeface="Malgun Gothic"/>
-                <a:ea typeface="Malgun Gothic"/>
-                <a:cs typeface="Malgun Gothic"/>
-              </a:rPr>
-              <a:t>비가역이며 이 경로의 rate-limiting step이다.</a:t>
-            </a:r>
-            <a:r>
-              <a:rPr sz="1400" b="0" i="0">
-                <a:solidFill>
-                  <a:srgbClr val="11202B"/>
-                </a:solidFill>
-                <a:latin typeface="Malgun Gothic"/>
-                <a:ea typeface="Malgun Gothic"/>
-                <a:cs typeface="Malgun Gothic"/>
-              </a:rPr>
-              <a:t> 4. Fructose-1,6-bisphosphate → dihydroxyacetone phosphate + glyceraldehyde-3-phosphate. Aldolase. 분자가 둘로 쪼개진다. 5. Dihydroxyacetone phosphate ⇌ glyceraldehyde-3-phosphate. Triose phosphate isomerase. 두 조각이 같은 분자가 되어 이후 단계가 하나로 통일된다.</a:t>
+              <a:t>(간은 glucokinase). ATP 소모. 인산기가 붙으면 음전하 때문에 막을 통과하지 못해 세포 안에 갇힌다.</a:t>
             </a:r>
           </a:p>
           <a:p>
@@ -32553,8 +32751,179 @@
               <a:t>•  </a:t>
             </a:r>
             <a:r>
+              <a:rPr sz="1400" b="0" i="0">
+                <a:solidFill>
+                  <a:srgbClr val="11202B"/>
+                </a:solidFill>
+                <a:latin typeface="Malgun Gothic"/>
+                <a:ea typeface="Malgun Gothic"/>
+                <a:cs typeface="Malgun Gothic"/>
+              </a:rPr>
+              <a:t>2. Glucose-6-phosphate ⇌ fructose-6-phosphate. Phosphoglucose isomerase. 6각 고리가 5각 고리로 바뀌어 C1에 인산을 받을 준비가 된다.</a:t>
+            </a:r>
+          </a:p>
+          <a:p>
+            <a:pPr>
+              <a:spcAft>
+                <a:spcPts val="900"/>
+              </a:spcAft>
+            </a:pPr>
+            <a:r>
               <a:rPr sz="1400" b="1" i="0">
                 <a:solidFill>
+                  <a:srgbClr val="F2B705"/>
+                </a:solidFill>
+                <a:latin typeface="Malgun Gothic"/>
+                <a:ea typeface="Malgun Gothic"/>
+                <a:cs typeface="Malgun Gothic"/>
+              </a:rPr>
+              <a:t>•  </a:t>
+            </a:r>
+            <a:r>
+              <a:rPr sz="1400" b="0" i="0">
+                <a:solidFill>
+                  <a:srgbClr val="11202B"/>
+                </a:solidFill>
+                <a:latin typeface="Malgun Gothic"/>
+                <a:ea typeface="Malgun Gothic"/>
+                <a:cs typeface="Malgun Gothic"/>
+              </a:rPr>
+              <a:t>3. Fructose-6-phosphate → </a:t>
+            </a:r>
+            <a:r>
+              <a:rPr sz="1400" b="1" i="0">
+                <a:solidFill>
+                  <a:srgbClr val="11202B"/>
+                </a:solidFill>
+                <a:latin typeface="Malgun Gothic"/>
+                <a:ea typeface="Malgun Gothic"/>
+                <a:cs typeface="Malgun Gothic"/>
+              </a:rPr>
+              <a:t>fructose-1,6-bisphosphate</a:t>
+            </a:r>
+            <a:r>
+              <a:rPr sz="1400" b="0" i="0">
+                <a:solidFill>
+                  <a:srgbClr val="11202B"/>
+                </a:solidFill>
+                <a:latin typeface="Malgun Gothic"/>
+                <a:ea typeface="Malgun Gothic"/>
+                <a:cs typeface="Malgun Gothic"/>
+              </a:rPr>
+              <a:t>. </a:t>
+            </a:r>
+            <a:r>
+              <a:rPr sz="1400" b="1" i="0">
+                <a:solidFill>
+                  <a:srgbClr val="11202B"/>
+                </a:solidFill>
+                <a:latin typeface="Malgun Gothic"/>
+                <a:ea typeface="Malgun Gothic"/>
+                <a:cs typeface="Malgun Gothic"/>
+              </a:rPr>
+              <a:t>Phosphofructokinase-1(PFK-1)</a:t>
+            </a:r>
+            <a:r>
+              <a:rPr sz="1400" b="0" i="0">
+                <a:solidFill>
+                  <a:srgbClr val="11202B"/>
+                </a:solidFill>
+                <a:latin typeface="Malgun Gothic"/>
+                <a:ea typeface="Malgun Gothic"/>
+                <a:cs typeface="Malgun Gothic"/>
+              </a:rPr>
+              <a:t>. ATP 소모. </a:t>
+            </a:r>
+            <a:r>
+              <a:rPr sz="1400" b="1" i="0">
+                <a:solidFill>
+                  <a:srgbClr val="11202B"/>
+                </a:solidFill>
+                <a:latin typeface="Malgun Gothic"/>
+                <a:ea typeface="Malgun Gothic"/>
+                <a:cs typeface="Malgun Gothic"/>
+              </a:rPr>
+              <a:t>비가역이며 이 경로의 rate-limiting step이다.</a:t>
+            </a:r>
+          </a:p>
+          <a:p>
+            <a:pPr>
+              <a:spcAft>
+                <a:spcPts val="900"/>
+              </a:spcAft>
+            </a:pPr>
+            <a:r>
+              <a:rPr sz="1400" b="1" i="0">
+                <a:solidFill>
+                  <a:srgbClr val="F2B705"/>
+                </a:solidFill>
+                <a:latin typeface="Malgun Gothic"/>
+                <a:ea typeface="Malgun Gothic"/>
+                <a:cs typeface="Malgun Gothic"/>
+              </a:rPr>
+              <a:t>•  </a:t>
+            </a:r>
+            <a:r>
+              <a:rPr sz="1400" b="0" i="0">
+                <a:solidFill>
+                  <a:srgbClr val="11202B"/>
+                </a:solidFill>
+                <a:latin typeface="Malgun Gothic"/>
+                <a:ea typeface="Malgun Gothic"/>
+                <a:cs typeface="Malgun Gothic"/>
+              </a:rPr>
+              <a:t>4. Fructose-1,6-bisphosphate → dihydroxyacetone phosphate + glyceraldehyde-3-phosphate. Aldolase. 분자가 둘로 쪼개진다.</a:t>
+            </a:r>
+          </a:p>
+          <a:p>
+            <a:pPr>
+              <a:spcAft>
+                <a:spcPts val="900"/>
+              </a:spcAft>
+            </a:pPr>
+            <a:r>
+              <a:rPr sz="1400" b="1" i="0">
+                <a:solidFill>
+                  <a:srgbClr val="F2B705"/>
+                </a:solidFill>
+                <a:latin typeface="Malgun Gothic"/>
+                <a:ea typeface="Malgun Gothic"/>
+                <a:cs typeface="Malgun Gothic"/>
+              </a:rPr>
+              <a:t>•  </a:t>
+            </a:r>
+            <a:r>
+              <a:rPr sz="1400" b="0" i="0">
+                <a:solidFill>
+                  <a:srgbClr val="11202B"/>
+                </a:solidFill>
+                <a:latin typeface="Malgun Gothic"/>
+                <a:ea typeface="Malgun Gothic"/>
+                <a:cs typeface="Malgun Gothic"/>
+              </a:rPr>
+              <a:t>5. Dihydroxyacetone phosphate ⇌ glyceraldehyde-3-phosphate. Triose phosphate isomerase. 두 조각이 같은 분자가 되어 이후 단계가 하나로 통일된다.</a:t>
+            </a:r>
+          </a:p>
+          <a:p>
+            <a:pPr>
+              <a:spcAft>
+                <a:spcPts val="900"/>
+              </a:spcAft>
+            </a:pPr>
+            <a:r>
+              <a:rPr sz="1400" b="1" i="0">
+                <a:solidFill>
+                  <a:srgbClr val="F2B705"/>
+                </a:solidFill>
+                <a:latin typeface="Malgun Gothic"/>
+                <a:ea typeface="Malgun Gothic"/>
+                <a:cs typeface="Malgun Gothic"/>
+              </a:rPr>
+              <a:t>•  </a:t>
+            </a:r>
+            <a:r>
+              <a:rPr sz="1400" b="1" i="0">
+                <a:solidFill>
                   <a:srgbClr val="11202B"/>
                 </a:solidFill>
                 <a:latin typeface="Malgun Gothic"/>
@@ -32573,6 +32942,137 @@
                 <a:cs typeface="Malgun Gothic"/>
               </a:rPr>
               <a:t> 조각 하나당 ATP 두 개와 NADH 하나를 얻는다. 조각이 둘이므로 전체로는 ATP 4개, NADH 2개다.</a:t>
+            </a:r>
+          </a:p>
+          <a:p>
+            <a:pPr>
+              <a:spcAft>
+                <a:spcPts val="900"/>
+              </a:spcAft>
+            </a:pPr>
+            <a:r>
+              <a:rPr sz="1400" b="1" i="0">
+                <a:solidFill>
+                  <a:srgbClr val="F2B705"/>
+                </a:solidFill>
+                <a:latin typeface="Malgun Gothic"/>
+                <a:ea typeface="Malgun Gothic"/>
+                <a:cs typeface="Malgun Gothic"/>
+              </a:rPr>
+              <a:t>•  </a:t>
+            </a:r>
+            <a:r>
+              <a:rPr sz="1400" b="0" i="0">
+                <a:solidFill>
+                  <a:srgbClr val="11202B"/>
+                </a:solidFill>
+                <a:latin typeface="Malgun Gothic"/>
+                <a:ea typeface="Malgun Gothic"/>
+                <a:cs typeface="Malgun Gothic"/>
+              </a:rPr>
+              <a:t>1. Glyceraldehyde-3-phosphate → 1,3-bisphosphoglycerate. </a:t>
+            </a:r>
+            <a:r>
+              <a:rPr sz="1400" b="1" i="0">
+                <a:solidFill>
+                  <a:srgbClr val="11202B"/>
+                </a:solidFill>
+                <a:latin typeface="Malgun Gothic"/>
+                <a:ea typeface="Malgun Gothic"/>
+                <a:cs typeface="Malgun Gothic"/>
+              </a:rPr>
+              <a:t>Glyceraldehyde-3-phosphate dehydrogenase</a:t>
+            </a:r>
+            <a:r>
+              <a:rPr sz="1400" b="0" i="0">
+                <a:solidFill>
+                  <a:srgbClr val="11202B"/>
+                </a:solidFill>
+                <a:latin typeface="Malgun Gothic"/>
+                <a:ea typeface="Malgun Gothic"/>
+                <a:cs typeface="Malgun Gothic"/>
+              </a:rPr>
+              <a:t>. 산화와 인산화가 동시에 일어난다. NAD⁺가 NADH로 환원되고, 무기인산이 결합해 전이 능력이 큰 화합물(−49.4 kJ/mol)이 만들어진다.</a:t>
+            </a:r>
+          </a:p>
+          <a:p>
+            <a:pPr>
+              <a:spcAft>
+                <a:spcPts val="900"/>
+              </a:spcAft>
+            </a:pPr>
+            <a:r>
+              <a:rPr sz="1400" b="1" i="0">
+                <a:solidFill>
+                  <a:srgbClr val="F2B705"/>
+                </a:solidFill>
+                <a:latin typeface="Malgun Gothic"/>
+                <a:ea typeface="Malgun Gothic"/>
+                <a:cs typeface="Malgun Gothic"/>
+              </a:rPr>
+              <a:t>•  </a:t>
+            </a:r>
+            <a:r>
+              <a:rPr sz="1400" b="0" i="0">
+                <a:solidFill>
+                  <a:srgbClr val="11202B"/>
+                </a:solidFill>
+                <a:latin typeface="Malgun Gothic"/>
+                <a:ea typeface="Malgun Gothic"/>
+                <a:cs typeface="Malgun Gothic"/>
+              </a:rPr>
+              <a:t>2. 1,3-Bisphosphoglycerate → 3-phosphoglycerate. Phosphoglycerate kinase. </a:t>
+            </a:r>
+            <a:r>
+              <a:rPr sz="1400" b="1" i="0">
+                <a:solidFill>
+                  <a:srgbClr val="11202B"/>
+                </a:solidFill>
+                <a:latin typeface="Malgun Gothic"/>
+                <a:ea typeface="Malgun Gothic"/>
+                <a:cs typeface="Malgun Gothic"/>
+              </a:rPr>
+              <a:t>ATP 생성.</a:t>
+            </a:r>
+            <a:r>
+              <a:rPr sz="1400" b="0" i="0">
+                <a:solidFill>
+                  <a:srgbClr val="11202B"/>
+                </a:solidFill>
+                <a:latin typeface="Malgun Gothic"/>
+                <a:ea typeface="Malgun Gothic"/>
+                <a:cs typeface="Malgun Gothic"/>
+              </a:rPr>
+              <a:t> 기질의 인산기를 ADP로 직접 넘기므로 substrate-level phosphorylation이다.</a:t>
+            </a:r>
+          </a:p>
+          <a:p>
+            <a:pPr>
+              <a:spcAft>
+                <a:spcPts val="900"/>
+              </a:spcAft>
+            </a:pPr>
+            <a:r>
+              <a:rPr sz="1400" b="1" i="0">
+                <a:solidFill>
+                  <a:srgbClr val="F2B705"/>
+                </a:solidFill>
+                <a:latin typeface="Malgun Gothic"/>
+                <a:ea typeface="Malgun Gothic"/>
+                <a:cs typeface="Malgun Gothic"/>
+              </a:rPr>
+              <a:t>•  </a:t>
+            </a:r>
+            <a:r>
+              <a:rPr sz="1400" b="0" i="0">
+                <a:solidFill>
+                  <a:srgbClr val="11202B"/>
+                </a:solidFill>
+                <a:latin typeface="Malgun Gothic"/>
+                <a:ea typeface="Malgun Gothic"/>
+                <a:cs typeface="Malgun Gothic"/>
+              </a:rPr>
+              <a:t>3. 3-Phosphoglycerate ⇌ 2-phosphoglycerate. Phosphoglycerate mutase.</a:t>
             </a:r>
           </a:p>
         </p:txBody>
